--- a/assets/powerpoints/module-n2-autobus/B2-repeter-pour-etre-sur.pptx
+++ b/assets/powerpoints/module-n2-autobus/B2-repeter-pour-etre-sur.pptx
@@ -9339,7 +9339,25 @@
                 </a:solidFill>
                 <a:latin typeface="Verdana"/>
               </a:rPr>
-              <a:t>« Tout droit, à droite au feu. &lt;b&gt;C'est ça ?&lt;/b&gt; » — On ne redit pas toute la phrase : seulement la direction et le repère.</a:t>
+              <a:t>« Tout droit, à droite au feu. </a:t>
+            </a:r>
+            <a:r>
+              <a:rPr sz="2000" b="1" i="0">
+                <a:solidFill>
+                  <a:srgbClr val="4B4F52"/>
+                </a:solidFill>
+                <a:latin typeface="Verdana"/>
+              </a:rPr>
+              <a:t>C'est ça ?</a:t>
+            </a:r>
+            <a:r>
+              <a:rPr sz="2000" b="0" i="0">
+                <a:solidFill>
+                  <a:srgbClr val="4B4F52"/>
+                </a:solidFill>
+                <a:latin typeface="Verdana"/>
+              </a:rPr>
+              <a:t> » — On ne redit pas toute la phrase : seulement la direction et le repère.</a:t>
             </a:r>
           </a:p>
         </p:txBody>
